--- a/content/W02/D5/slides/C2_W02_D05_half1_STUDENT.pptx
+++ b/content/W02/D5/slides/C2_W02_D05_half1_STUDENT.pptx
@@ -3493,14 +3493,14 @@
       </p:sp>
       <p:pic>
         <p:nvPicPr>
-          <p:cNvPr id="6" name="Picture 5" descr="cadd18fbc6a88397.png"/>
+          <p:cNvPr id="6" name="Picture 5" descr="5ba8bb36c5e0aee4.png"/>
           <p:cNvPicPr>
             <a:picLocks noChangeAspect="1"/>
           </p:cNvPicPr>
           <p:nvPr/>
         </p:nvPicPr>
         <p:blipFill>
-          <a:blip r:embed="rId2"/>
+          <a:blip r:embed="rId3"/>
           <a:stretch>
             <a:fillRect/>
           </a:stretch>
@@ -6699,14 +6699,14 @@
       </p:sp>
       <p:pic>
         <p:nvPicPr>
-          <p:cNvPr id="7" name="Picture 6" descr="9ac11ac709141a8b.png"/>
+          <p:cNvPr id="7" name="Picture 6" descr="1e978b563441638e.png"/>
           <p:cNvPicPr>
             <a:picLocks noChangeAspect="1"/>
           </p:cNvPicPr>
           <p:nvPr/>
         </p:nvPicPr>
         <p:blipFill>
-          <a:blip r:embed="rId2"/>
+          <a:blip r:embed="rId3"/>
           <a:stretch>
             <a:fillRect/>
           </a:stretch>
@@ -7116,14 +7116,14 @@
       </p:sp>
       <p:pic>
         <p:nvPicPr>
-          <p:cNvPr id="6" name="Picture 5" descr="7529f118d7d8aec9.png"/>
+          <p:cNvPr id="6" name="Picture 5" descr="9da65133d56f32ba.png"/>
           <p:cNvPicPr>
             <a:picLocks noChangeAspect="1"/>
           </p:cNvPicPr>
           <p:nvPr/>
         </p:nvPicPr>
         <p:blipFill>
-          <a:blip r:embed="rId2"/>
+          <a:blip r:embed="rId3"/>
           <a:stretch>
             <a:fillRect/>
           </a:stretch>
@@ -9098,14 +9098,14 @@
       </p:sp>
       <p:pic>
         <p:nvPicPr>
-          <p:cNvPr id="6" name="Picture 5" descr="2016622f5aa84704.png"/>
+          <p:cNvPr id="6" name="Picture 5" descr="814684cf1e73ee52.png"/>
           <p:cNvPicPr>
             <a:picLocks noChangeAspect="1"/>
           </p:cNvPicPr>
           <p:nvPr/>
         </p:nvPicPr>
         <p:blipFill>
-          <a:blip r:embed="rId2"/>
+          <a:blip r:embed="rId3"/>
           <a:stretch>
             <a:fillRect/>
           </a:stretch>
@@ -10068,14 +10068,14 @@
       </p:sp>
       <p:pic>
         <p:nvPicPr>
-          <p:cNvPr id="6" name="Picture 5" descr="a66552315c8b5871.png"/>
+          <p:cNvPr id="6" name="Picture 5" descr="1c1c432ea6dd8892.png"/>
           <p:cNvPicPr>
             <a:picLocks noChangeAspect="1"/>
           </p:cNvPicPr>
           <p:nvPr/>
         </p:nvPicPr>
         <p:blipFill>
-          <a:blip r:embed="rId2"/>
+          <a:blip r:embed="rId3"/>
           <a:stretch>
             <a:fillRect/>
           </a:stretch>

--- a/content/W02/D5/slides/C2_W02_D05_half1_STUDENT.pptx
+++ b/content/W02/D5/slides/C2_W02_D05_half1_STUDENT.pptx
@@ -17271,7 +17271,7 @@
                 </a:solidFill>
                 <a:latin typeface="Calibri"/>
               </a:rPr>
-              <a:t>A helper column marks the first row of each order, and the tree sums only those.</a:t>
+              <a:t>A helper column flags the first row of each order, and the tree sums only those.</a:t>
             </a:r>
           </a:p>
         </p:txBody>

--- a/content/W02/D5/slides/C2_W02_D05_half1_STUDENT.pptx
+++ b/content/W02/D5/slides/C2_W02_D05_half1_STUDENT.pptx
@@ -18353,7 +18353,7 @@
                 </a:solidFill>
                 <a:latin typeface="Calibri"/>
               </a:rPr>
-              <a:t>Week 2 Day 5: the number reaches the leadership deck</a:t>
+              <a:t>Week 2, Day 5. The number reaches the leadership deck</a:t>
             </a:r>
           </a:p>
         </p:txBody>
@@ -22617,7 +22617,7 @@
                 </a:solidFill>
                 <a:latin typeface="Calibri"/>
               </a:rPr>
-              <a:t>Week 2 Day 5: the number reaches the leadership deck</a:t>
+              <a:t>Week 2, Day 5. The number reaches the leadership deck</a:t>
             </a:r>
           </a:p>
         </p:txBody>
@@ -35225,7 +35225,7 @@
                 </a:solidFill>
                 <a:latin typeface="Calibri"/>
               </a:rPr>
-              <a:t>Week 2 Day 5: the number reaches the leadership deck</a:t>
+              <a:t>Week 2, Day 5. The number reaches the leadership deck</a:t>
             </a:r>
           </a:p>
         </p:txBody>
@@ -38731,7 +38731,7 @@
         <p:spPr>
           <a:xfrm>
             <a:off x="530352" y="3419856"/>
-            <a:ext cx="11130991" cy="772160"/>
+            <a:ext cx="11130991" cy="1048512"/>
           </a:xfrm>
           <a:prstGeom prst="rect">
             <a:avLst/>
@@ -38757,6 +38757,24 @@
                 <a:latin typeface="Calibri"/>
               </a:rPr>
               <a:t>The answer is b. </a:t>
+            </a:r>
+            <a:r>
+              <a:rPr sz="1600" b="1" i="0">
+                <a:solidFill>
+                  <a:srgbClr val="1A1440"/>
+                </a:solidFill>
+                <a:latin typeface="Calibri"/>
+              </a:rPr>
+              <a:t>The check:</a:t>
+            </a:r>
+            <a:r>
+              <a:rPr sz="1600" b="0" i="0">
+                <a:solidFill>
+                  <a:srgbClr val="1A1440"/>
+                </a:solidFill>
+                <a:latin typeface="Calibri"/>
+              </a:rPr>
+              <a:t> read the card aloud and ask which months, and against what; a card that cannot answer is not ready. </a:t>
             </a:r>
             <a:r>
               <a:rPr sz="1600" b="1" i="0">
@@ -49945,7 +49963,7 @@
                 </a:solidFill>
                 <a:latin typeface="Calibri"/>
               </a:rPr>
-              <a:t>Week 2 Day 5: the number reaches the leadership deck</a:t>
+              <a:t>Week 2, Day 5. The number reaches the leadership deck</a:t>
             </a:r>
           </a:p>
         </p:txBody>
